--- a/AgentBench-路演PPT.pptx
+++ b/AgentBench-路演PPT.pptx
@@ -4207,59 +4207,6 @@
             </a:pPr>
             <a:r>
               <a:t>三个核心亮点</a:t>
-            </a:r>
-          </a:p>
-        </p:txBody>
-      </p:sp>
-      <p:sp>
-        <p:nvSpPr>
-          <p:cNvPr id="3" name="Rectangle 2"/>
-          <p:cNvSpPr/>
-          <p:nvPr/>
-        </p:nvSpPr>
-        <p:spPr>
-          <a:xfrm>
-            <a:off x="6583680" y="594360"/>
-            <a:ext cx="1828800" cy="347472"/>
-          </a:xfrm>
-          <a:prstGeom prst="rect">
-            <a:avLst/>
-          </a:prstGeom>
-          <a:solidFill>
-            <a:srgbClr val="1A1B3A"/>
-          </a:solidFill>
-          <a:ln>
-            <a:noFill/>
-          </a:ln>
-        </p:spPr>
-        <p:style>
-          <a:lnRef idx="1">
-            <a:schemeClr val="accent1"/>
-          </a:lnRef>
-          <a:fillRef idx="3">
-            <a:schemeClr val="accent1"/>
-          </a:fillRef>
-          <a:effectRef idx="2">
-            <a:schemeClr val="accent1"/>
-          </a:effectRef>
-          <a:fontRef idx="minor">
-            <a:schemeClr val="lt1"/>
-          </a:fontRef>
-        </p:style>
-        <p:txBody>
-          <a:bodyPr wrap="none" rtlCol="0" anchor="ctr"/>
-          <a:lstStyle/>
-          <a:p>
-            <a:pPr algn="ctr">
-              <a:defRPr sz="1000" b="1">
-                <a:solidFill>
-                  <a:srgbClr val="818CF8"/>
-                </a:solidFill>
-                <a:latin typeface="微软雅黑" panose="020B0503020204020204" charset="-122"/>
-              </a:defRPr>
-            </a:pPr>
-            <a:r>
-              <a:t>按 BP 优先级排序</a:t>
             </a:r>
           </a:p>
         </p:txBody>
